--- a/class/cloud_infra_mgmt/03주차_Docker심화/01_강의자료/1차시_Dockerfile문법.pptx
+++ b/class/cloud_infra_mgmt/03주차_Docker심화/01_강의자료/1차시_Dockerfile문법.pptx
@@ -10234,7 +10234,7 @@
               </a:lnSpc>
             </a:pPr>
             <a:r>
-              <a:rPr sz="1500" b="1">
+              <a:rPr sz="1700" b="1">
                 <a:solidFill>
                   <a:srgbClr val="0D9488"/>
                 </a:solidFill>
@@ -10243,7 +10243,7 @@
               <a:t>●  </a:t>
             </a:r>
             <a:r>
-              <a:rPr sz="1500" b="0">
+              <a:rPr sz="1700" b="0">
                 <a:solidFill>
                   <a:srgbClr val="222733"/>
                 </a:solidFill>
@@ -10259,7 +10259,7 @@
               </a:lnSpc>
             </a:pPr>
             <a:r>
-              <a:rPr sz="1500" b="1">
+              <a:rPr sz="1700" b="1">
                 <a:solidFill>
                   <a:srgbClr val="0D9488"/>
                 </a:solidFill>
@@ -10268,7 +10268,7 @@
               <a:t>●  </a:t>
             </a:r>
             <a:r>
-              <a:rPr sz="1500" b="0">
+              <a:rPr sz="1700" b="0">
                 <a:solidFill>
                   <a:srgbClr val="222733"/>
                 </a:solidFill>
@@ -10284,7 +10284,7 @@
               </a:lnSpc>
             </a:pPr>
             <a:r>
-              <a:rPr sz="1500" b="1">
+              <a:rPr sz="1700" b="1">
                 <a:solidFill>
                   <a:srgbClr val="0D9488"/>
                 </a:solidFill>
@@ -10293,7 +10293,7 @@
               <a:t>●  </a:t>
             </a:r>
             <a:r>
-              <a:rPr sz="1500" b="0">
+              <a:rPr sz="1700" b="0">
                 <a:solidFill>
                   <a:srgbClr val="222733"/>
                 </a:solidFill>

--- a/class/cloud_infra_mgmt/03주차_Docker심화/01_강의자료/1차시_Dockerfile문법.pptx
+++ b/class/cloud_infra_mgmt/03주차_Docker심화/01_강의자료/1차시_Dockerfile문법.pptx
@@ -5080,7 +5080,7 @@
           <a:p>
             <a:pPr>
               <a:lnSpc>
-                <a:spcPct val="115000"/>
+                <a:spcPct val="149500"/>
               </a:lnSpc>
             </a:pPr>
             <a:r>
@@ -5105,7 +5105,7 @@
           <a:p>
             <a:pPr>
               <a:lnSpc>
-                <a:spcPct val="115000"/>
+                <a:spcPct val="149500"/>
               </a:lnSpc>
             </a:pPr>
             <a:r>
@@ -5130,7 +5130,7 @@
           <a:p>
             <a:pPr>
               <a:lnSpc>
-                <a:spcPct val="115000"/>
+                <a:spcPct val="149500"/>
               </a:lnSpc>
             </a:pPr>
             <a:r>
@@ -6379,16 +6379,104 @@
       </p:sp>
       <p:sp>
         <p:nvSpPr>
-          <p:cNvPr id="7" name="Isosceles Triangle 6"/>
+          <p:cNvPr id="7" name="Rectangle 6"/>
           <p:cNvSpPr/>
           <p:nvPr/>
         </p:nvSpPr>
         <p:spPr>
-          <a:xfrm rot="5400000">
-            <a:off x="3495751" y="1673352"/>
-            <a:ext cx="146304" cy="146304"/>
-          </a:xfrm>
-          <a:prstGeom prst="triangle">
+          <a:xfrm>
+            <a:off x="5096865" y="1730959"/>
+            <a:ext cx="1995220" cy="31089"/>
+          </a:xfrm>
+          <a:prstGeom prst="rect">
+            <a:avLst/>
+          </a:prstGeom>
+          <a:solidFill>
+            <a:srgbClr val="14B8A6"/>
+          </a:solidFill>
+          <a:ln>
+            <a:noFill/>
+          </a:ln>
+          <a:effectLst/>
+        </p:spPr>
+        <p:style>
+          <a:lnRef idx="1">
+            <a:schemeClr val="accent1"/>
+          </a:lnRef>
+          <a:fillRef idx="3">
+            <a:schemeClr val="accent1"/>
+          </a:fillRef>
+          <a:effectRef idx="2">
+            <a:schemeClr val="accent1"/>
+          </a:effectRef>
+          <a:fontRef idx="minor">
+            <a:schemeClr val="lt1"/>
+          </a:fontRef>
+        </p:style>
+        <p:txBody>
+          <a:bodyPr rtlCol="0" anchor="ctr"/>
+          <a:lstStyle/>
+          <a:p>
+            <a:pPr algn="ctr"/>
+          </a:p>
+        </p:txBody>
+      </p:sp>
+      <p:sp>
+        <p:nvSpPr>
+          <p:cNvPr id="8" name="Rectangle 7"/>
+          <p:cNvSpPr/>
+          <p:nvPr/>
+        </p:nvSpPr>
+        <p:spPr>
+          <a:xfrm>
+            <a:off x="7622438" y="1730959"/>
+            <a:ext cx="1995220" cy="31089"/>
+          </a:xfrm>
+          <a:prstGeom prst="rect">
+            <a:avLst/>
+          </a:prstGeom>
+          <a:solidFill>
+            <a:srgbClr val="14B8A6"/>
+          </a:solidFill>
+          <a:ln>
+            <a:noFill/>
+          </a:ln>
+          <a:effectLst/>
+        </p:spPr>
+        <p:style>
+          <a:lnRef idx="1">
+            <a:schemeClr val="accent1"/>
+          </a:lnRef>
+          <a:fillRef idx="3">
+            <a:schemeClr val="accent1"/>
+          </a:fillRef>
+          <a:effectRef idx="2">
+            <a:schemeClr val="accent1"/>
+          </a:effectRef>
+          <a:fontRef idx="minor">
+            <a:schemeClr val="lt1"/>
+          </a:fontRef>
+        </p:style>
+        <p:txBody>
+          <a:bodyPr rtlCol="0" anchor="ctr"/>
+          <a:lstStyle/>
+          <a:p>
+            <a:pPr algn="ctr"/>
+          </a:p>
+        </p:txBody>
+      </p:sp>
+      <p:sp>
+        <p:nvSpPr>
+          <p:cNvPr id="9" name="Oval 8"/>
+          <p:cNvSpPr/>
+          <p:nvPr/>
+        </p:nvSpPr>
+        <p:spPr>
+          <a:xfrm>
+            <a:off x="2040940" y="1481328"/>
+            <a:ext cx="530352" cy="530352"/>
+          </a:xfrm>
+          <a:prstGeom prst="ellipse">
             <a:avLst/>
           </a:prstGeom>
           <a:solidFill>
@@ -6423,227 +6511,7 @@
       </p:sp>
       <p:sp>
         <p:nvSpPr>
-          <p:cNvPr id="8" name="Rectangle 7"/>
-          <p:cNvSpPr/>
-          <p:nvPr/>
-        </p:nvSpPr>
-        <p:spPr>
-          <a:xfrm>
-            <a:off x="5096865" y="1730959"/>
-            <a:ext cx="1995220" cy="31089"/>
-          </a:xfrm>
-          <a:prstGeom prst="rect">
-            <a:avLst/>
-          </a:prstGeom>
-          <a:solidFill>
-            <a:srgbClr val="14B8A6"/>
-          </a:solidFill>
-          <a:ln>
-            <a:noFill/>
-          </a:ln>
-          <a:effectLst/>
-        </p:spPr>
-        <p:style>
-          <a:lnRef idx="1">
-            <a:schemeClr val="accent1"/>
-          </a:lnRef>
-          <a:fillRef idx="3">
-            <a:schemeClr val="accent1"/>
-          </a:fillRef>
-          <a:effectRef idx="2">
-            <a:schemeClr val="accent1"/>
-          </a:effectRef>
-          <a:fontRef idx="minor">
-            <a:schemeClr val="lt1"/>
-          </a:fontRef>
-        </p:style>
-        <p:txBody>
-          <a:bodyPr rtlCol="0" anchor="ctr"/>
-          <a:lstStyle/>
-          <a:p>
-            <a:pPr algn="ctr"/>
-          </a:p>
-        </p:txBody>
-      </p:sp>
-      <p:sp>
-        <p:nvSpPr>
-          <p:cNvPr id="9" name="Isosceles Triangle 8"/>
-          <p:cNvSpPr/>
-          <p:nvPr/>
-        </p:nvSpPr>
-        <p:spPr>
-          <a:xfrm rot="5400000">
-            <a:off x="6021324" y="1673352"/>
-            <a:ext cx="146304" cy="146304"/>
-          </a:xfrm>
-          <a:prstGeom prst="triangle">
-            <a:avLst/>
-          </a:prstGeom>
-          <a:solidFill>
-            <a:srgbClr val="0D9488"/>
-          </a:solidFill>
-          <a:ln>
-            <a:noFill/>
-          </a:ln>
-          <a:effectLst/>
-        </p:spPr>
-        <p:style>
-          <a:lnRef idx="1">
-            <a:schemeClr val="accent1"/>
-          </a:lnRef>
-          <a:fillRef idx="3">
-            <a:schemeClr val="accent1"/>
-          </a:fillRef>
-          <a:effectRef idx="2">
-            <a:schemeClr val="accent1"/>
-          </a:effectRef>
-          <a:fontRef idx="minor">
-            <a:schemeClr val="lt1"/>
-          </a:fontRef>
-        </p:style>
-        <p:txBody>
-          <a:bodyPr rtlCol="0" anchor="ctr"/>
-          <a:lstStyle/>
-          <a:p>
-            <a:pPr algn="ctr"/>
-          </a:p>
-        </p:txBody>
-      </p:sp>
-      <p:sp>
-        <p:nvSpPr>
-          <p:cNvPr id="10" name="Rectangle 9"/>
-          <p:cNvSpPr/>
-          <p:nvPr/>
-        </p:nvSpPr>
-        <p:spPr>
-          <a:xfrm>
-            <a:off x="7622438" y="1730959"/>
-            <a:ext cx="1995220" cy="31089"/>
-          </a:xfrm>
-          <a:prstGeom prst="rect">
-            <a:avLst/>
-          </a:prstGeom>
-          <a:solidFill>
-            <a:srgbClr val="14B8A6"/>
-          </a:solidFill>
-          <a:ln>
-            <a:noFill/>
-          </a:ln>
-          <a:effectLst/>
-        </p:spPr>
-        <p:style>
-          <a:lnRef idx="1">
-            <a:schemeClr val="accent1"/>
-          </a:lnRef>
-          <a:fillRef idx="3">
-            <a:schemeClr val="accent1"/>
-          </a:fillRef>
-          <a:effectRef idx="2">
-            <a:schemeClr val="accent1"/>
-          </a:effectRef>
-          <a:fontRef idx="minor">
-            <a:schemeClr val="lt1"/>
-          </a:fontRef>
-        </p:style>
-        <p:txBody>
-          <a:bodyPr rtlCol="0" anchor="ctr"/>
-          <a:lstStyle/>
-          <a:p>
-            <a:pPr algn="ctr"/>
-          </a:p>
-        </p:txBody>
-      </p:sp>
-      <p:sp>
-        <p:nvSpPr>
-          <p:cNvPr id="11" name="Isosceles Triangle 10"/>
-          <p:cNvSpPr/>
-          <p:nvPr/>
-        </p:nvSpPr>
-        <p:spPr>
-          <a:xfrm rot="5400000">
-            <a:off x="8546896" y="1673352"/>
-            <a:ext cx="146304" cy="146304"/>
-          </a:xfrm>
-          <a:prstGeom prst="triangle">
-            <a:avLst/>
-          </a:prstGeom>
-          <a:solidFill>
-            <a:srgbClr val="0D9488"/>
-          </a:solidFill>
-          <a:ln>
-            <a:noFill/>
-          </a:ln>
-          <a:effectLst/>
-        </p:spPr>
-        <p:style>
-          <a:lnRef idx="1">
-            <a:schemeClr val="accent1"/>
-          </a:lnRef>
-          <a:fillRef idx="3">
-            <a:schemeClr val="accent1"/>
-          </a:fillRef>
-          <a:effectRef idx="2">
-            <a:schemeClr val="accent1"/>
-          </a:effectRef>
-          <a:fontRef idx="minor">
-            <a:schemeClr val="lt1"/>
-          </a:fontRef>
-        </p:style>
-        <p:txBody>
-          <a:bodyPr rtlCol="0" anchor="ctr"/>
-          <a:lstStyle/>
-          <a:p>
-            <a:pPr algn="ctr"/>
-          </a:p>
-        </p:txBody>
-      </p:sp>
-      <p:sp>
-        <p:nvSpPr>
-          <p:cNvPr id="12" name="Oval 11"/>
-          <p:cNvSpPr/>
-          <p:nvPr/>
-        </p:nvSpPr>
-        <p:spPr>
-          <a:xfrm>
-            <a:off x="2040940" y="1481328"/>
-            <a:ext cx="530352" cy="530352"/>
-          </a:xfrm>
-          <a:prstGeom prst="ellipse">
-            <a:avLst/>
-          </a:prstGeom>
-          <a:solidFill>
-            <a:srgbClr val="0D9488"/>
-          </a:solidFill>
-          <a:ln>
-            <a:noFill/>
-          </a:ln>
-          <a:effectLst/>
-        </p:spPr>
-        <p:style>
-          <a:lnRef idx="1">
-            <a:schemeClr val="accent1"/>
-          </a:lnRef>
-          <a:fillRef idx="3">
-            <a:schemeClr val="accent1"/>
-          </a:fillRef>
-          <a:effectRef idx="2">
-            <a:schemeClr val="accent1"/>
-          </a:effectRef>
-          <a:fontRef idx="minor">
-            <a:schemeClr val="lt1"/>
-          </a:fontRef>
-        </p:style>
-        <p:txBody>
-          <a:bodyPr rtlCol="0" anchor="ctr"/>
-          <a:lstStyle/>
-          <a:p>
-            <a:pPr algn="ctr"/>
-          </a:p>
-        </p:txBody>
-      </p:sp>
-      <p:sp>
-        <p:nvSpPr>
-          <p:cNvPr id="13" name="TextBox 12"/>
+          <p:cNvPr id="10" name="TextBox 9"/>
           <p:cNvSpPr txBox="1"/>
           <p:nvPr/>
         </p:nvSpPr>
@@ -6678,7 +6546,7 @@
       </p:sp>
       <p:sp>
         <p:nvSpPr>
-          <p:cNvPr id="14" name="Rounded Rectangle 13"/>
+          <p:cNvPr id="11" name="Rounded Rectangle 10"/>
           <p:cNvSpPr/>
           <p:nvPr/>
         </p:nvSpPr>
@@ -6726,7 +6594,7 @@
       </p:sp>
       <p:sp>
         <p:nvSpPr>
-          <p:cNvPr id="15" name="TextBox 14"/>
+          <p:cNvPr id="12" name="TextBox 11"/>
           <p:cNvSpPr txBox="1"/>
           <p:nvPr/>
         </p:nvSpPr>
@@ -6761,7 +6629,7 @@
       </p:sp>
       <p:sp>
         <p:nvSpPr>
-          <p:cNvPr id="16" name="TextBox 15"/>
+          <p:cNvPr id="13" name="TextBox 12"/>
           <p:cNvSpPr txBox="1"/>
           <p:nvPr/>
         </p:nvSpPr>
@@ -6800,7 +6668,7 @@
       </p:sp>
       <p:sp>
         <p:nvSpPr>
-          <p:cNvPr id="17" name="Oval 16"/>
+          <p:cNvPr id="14" name="Oval 13"/>
           <p:cNvSpPr/>
           <p:nvPr/>
         </p:nvSpPr>
@@ -6844,7 +6712,7 @@
       </p:sp>
       <p:sp>
         <p:nvSpPr>
-          <p:cNvPr id="18" name="TextBox 17"/>
+          <p:cNvPr id="15" name="TextBox 14"/>
           <p:cNvSpPr txBox="1"/>
           <p:nvPr/>
         </p:nvSpPr>
@@ -6879,7 +6747,7 @@
       </p:sp>
       <p:sp>
         <p:nvSpPr>
-          <p:cNvPr id="19" name="Rounded Rectangle 18"/>
+          <p:cNvPr id="16" name="Rounded Rectangle 15"/>
           <p:cNvSpPr/>
           <p:nvPr/>
         </p:nvSpPr>
@@ -6927,7 +6795,7 @@
       </p:sp>
       <p:sp>
         <p:nvSpPr>
-          <p:cNvPr id="20" name="TextBox 19"/>
+          <p:cNvPr id="17" name="TextBox 16"/>
           <p:cNvSpPr txBox="1"/>
           <p:nvPr/>
         </p:nvSpPr>
@@ -6962,7 +6830,7 @@
       </p:sp>
       <p:sp>
         <p:nvSpPr>
-          <p:cNvPr id="21" name="TextBox 20"/>
+          <p:cNvPr id="18" name="TextBox 17"/>
           <p:cNvSpPr txBox="1"/>
           <p:nvPr/>
         </p:nvSpPr>
@@ -7001,7 +6869,7 @@
       </p:sp>
       <p:sp>
         <p:nvSpPr>
-          <p:cNvPr id="22" name="Oval 21"/>
+          <p:cNvPr id="19" name="Oval 18"/>
           <p:cNvSpPr/>
           <p:nvPr/>
         </p:nvSpPr>
@@ -7045,7 +6913,7 @@
       </p:sp>
       <p:sp>
         <p:nvSpPr>
-          <p:cNvPr id="23" name="TextBox 22"/>
+          <p:cNvPr id="20" name="TextBox 19"/>
           <p:cNvSpPr txBox="1"/>
           <p:nvPr/>
         </p:nvSpPr>
@@ -7080,7 +6948,7 @@
       </p:sp>
       <p:sp>
         <p:nvSpPr>
-          <p:cNvPr id="24" name="Rounded Rectangle 23"/>
+          <p:cNvPr id="21" name="Rounded Rectangle 20"/>
           <p:cNvSpPr/>
           <p:nvPr/>
         </p:nvSpPr>
@@ -7128,7 +6996,7 @@
       </p:sp>
       <p:sp>
         <p:nvSpPr>
-          <p:cNvPr id="25" name="TextBox 24"/>
+          <p:cNvPr id="22" name="TextBox 21"/>
           <p:cNvSpPr txBox="1"/>
           <p:nvPr/>
         </p:nvSpPr>
@@ -7163,7 +7031,7 @@
       </p:sp>
       <p:sp>
         <p:nvSpPr>
-          <p:cNvPr id="26" name="TextBox 25"/>
+          <p:cNvPr id="23" name="TextBox 22"/>
           <p:cNvSpPr txBox="1"/>
           <p:nvPr/>
         </p:nvSpPr>
@@ -7202,7 +7070,7 @@
       </p:sp>
       <p:sp>
         <p:nvSpPr>
-          <p:cNvPr id="27" name="Oval 26"/>
+          <p:cNvPr id="24" name="Oval 23"/>
           <p:cNvSpPr/>
           <p:nvPr/>
         </p:nvSpPr>
@@ -7246,7 +7114,7 @@
       </p:sp>
       <p:sp>
         <p:nvSpPr>
-          <p:cNvPr id="28" name="TextBox 27"/>
+          <p:cNvPr id="25" name="TextBox 24"/>
           <p:cNvSpPr txBox="1"/>
           <p:nvPr/>
         </p:nvSpPr>
@@ -7281,7 +7149,7 @@
       </p:sp>
       <p:sp>
         <p:nvSpPr>
-          <p:cNvPr id="29" name="Rounded Rectangle 28"/>
+          <p:cNvPr id="26" name="Rounded Rectangle 25"/>
           <p:cNvSpPr/>
           <p:nvPr/>
         </p:nvSpPr>
@@ -7329,7 +7197,7 @@
       </p:sp>
       <p:sp>
         <p:nvSpPr>
-          <p:cNvPr id="30" name="TextBox 29"/>
+          <p:cNvPr id="27" name="TextBox 26"/>
           <p:cNvSpPr txBox="1"/>
           <p:nvPr/>
         </p:nvSpPr>
@@ -7364,7 +7232,7 @@
       </p:sp>
       <p:sp>
         <p:nvSpPr>
-          <p:cNvPr id="31" name="TextBox 30"/>
+          <p:cNvPr id="28" name="TextBox 27"/>
           <p:cNvSpPr txBox="1"/>
           <p:nvPr/>
         </p:nvSpPr>
@@ -7403,7 +7271,7 @@
       </p:sp>
       <p:sp>
         <p:nvSpPr>
-          <p:cNvPr id="32" name="TextBox 31"/>
+          <p:cNvPr id="29" name="TextBox 28"/>
           <p:cNvSpPr txBox="1"/>
           <p:nvPr/>
         </p:nvSpPr>
@@ -7438,7 +7306,7 @@
       </p:sp>
       <p:sp>
         <p:nvSpPr>
-          <p:cNvPr id="33" name="TextBox 32"/>
+          <p:cNvPr id="30" name="TextBox 29"/>
           <p:cNvSpPr txBox="1"/>
           <p:nvPr/>
         </p:nvSpPr>
@@ -7473,7 +7341,7 @@
       </p:sp>
       <p:sp>
         <p:nvSpPr>
-          <p:cNvPr id="34" name="Rectangle 33"/>
+          <p:cNvPr id="31" name="Rectangle 30"/>
           <p:cNvSpPr/>
           <p:nvPr/>
         </p:nvSpPr>
@@ -7997,7 +7865,7 @@
           <a:p>
             <a:pPr>
               <a:lnSpc>
-                <a:spcPct val="115000"/>
+                <a:spcPct val="149500"/>
               </a:lnSpc>
             </a:pPr>
             <a:r>
@@ -8022,7 +7890,7 @@
           <a:p>
             <a:pPr>
               <a:lnSpc>
-                <a:spcPct val="115000"/>
+                <a:spcPct val="149500"/>
               </a:lnSpc>
             </a:pPr>
             <a:r>
@@ -8047,7 +7915,7 @@
           <a:p>
             <a:pPr>
               <a:lnSpc>
-                <a:spcPct val="115000"/>
+                <a:spcPct val="149500"/>
               </a:lnSpc>
             </a:pPr>
             <a:r>
@@ -10230,7 +10098,7 @@
           <a:p>
             <a:pPr>
               <a:lnSpc>
-                <a:spcPct val="115000"/>
+                <a:spcPct val="149500"/>
               </a:lnSpc>
             </a:pPr>
             <a:r>
@@ -10255,7 +10123,7 @@
           <a:p>
             <a:pPr>
               <a:lnSpc>
-                <a:spcPct val="115000"/>
+                <a:spcPct val="149500"/>
               </a:lnSpc>
             </a:pPr>
             <a:r>
@@ -10280,7 +10148,7 @@
           <a:p>
             <a:pPr>
               <a:lnSpc>
-                <a:spcPct val="115000"/>
+                <a:spcPct val="149500"/>
               </a:lnSpc>
             </a:pPr>
             <a:r>
@@ -11101,7 +10969,7 @@
           <a:p>
             <a:pPr>
               <a:lnSpc>
-                <a:spcPct val="115000"/>
+                <a:spcPct val="149500"/>
               </a:lnSpc>
             </a:pPr>
             <a:r>
@@ -11126,7 +10994,7 @@
           <a:p>
             <a:pPr>
               <a:lnSpc>
-                <a:spcPct val="115000"/>
+                <a:spcPct val="149500"/>
               </a:lnSpc>
             </a:pPr>
             <a:r>
@@ -11151,7 +11019,7 @@
           <a:p>
             <a:pPr>
               <a:lnSpc>
-                <a:spcPct val="115000"/>
+                <a:spcPct val="149500"/>
               </a:lnSpc>
             </a:pPr>
             <a:r>
@@ -11176,7 +11044,7 @@
           <a:p>
             <a:pPr>
               <a:lnSpc>
-                <a:spcPct val="115000"/>
+                <a:spcPct val="149500"/>
               </a:lnSpc>
             </a:pPr>
             <a:r>

--- a/class/cloud_infra_mgmt/03주차_Docker심화/01_강의자료/1차시_Dockerfile문법.pptx
+++ b/class/cloud_infra_mgmt/03주차_Docker심화/01_강의자료/1차시_Dockerfile문법.pptx
@@ -4716,6 +4716,8 @@
                   <a:srgbClr val="14B8A6"/>
                 </a:solidFill>
                 <a:latin typeface="맑은 고딕"/>
+                <a:ea typeface="맑은 고딕"/>
+                <a:cs typeface="맑은 고딕"/>
               </a:rPr>
               <a:t>클라우드인프라관리  ·  3주차 1차시</a:t>
             </a:r>
@@ -4751,6 +4753,8 @@
                   <a:srgbClr val="FFFFFF"/>
                 </a:solidFill>
                 <a:latin typeface="맑은 고딕"/>
+                <a:ea typeface="맑은 고딕"/>
+                <a:cs typeface="맑은 고딕"/>
               </a:rPr>
               <a:t>Dockerfile 문법</a:t>
             </a:r>
@@ -4786,6 +4790,8 @@
                   <a:srgbClr val="C9D3E6"/>
                 </a:solidFill>
                 <a:latin typeface="맑은 고딕"/>
+                <a:ea typeface="맑은 고딕"/>
+                <a:cs typeface="맑은 고딕"/>
               </a:rPr>
               <a:t>나만의 이미지를 만드는 레시피</a:t>
             </a:r>
@@ -4821,6 +4827,8 @@
                   <a:srgbClr val="FFFFFF"/>
                 </a:solidFill>
                 <a:latin typeface="맑은 고딕"/>
+                <a:ea typeface="맑은 고딕"/>
+                <a:cs typeface="맑은 고딕"/>
               </a:rPr>
               <a:t>영남이공대학교 김지윤교수</a:t>
             </a:r>
@@ -4980,6 +4988,8 @@
                   <a:srgbClr val="14213D"/>
                 </a:solidFill>
                 <a:latin typeface="맑은 고딕"/>
+                <a:ea typeface="맑은 고딕"/>
+                <a:cs typeface="맑은 고딕"/>
               </a:rPr>
               <a:t>03</a:t>
             </a:r>
@@ -5015,6 +5025,8 @@
                   <a:srgbClr val="14B8A6"/>
                 </a:solidFill>
                 <a:latin typeface="맑은 고딕"/>
+                <a:ea typeface="맑은 고딕"/>
+                <a:cs typeface="맑은 고딕"/>
               </a:rPr>
               <a:t>실습 안내</a:t>
             </a:r>
@@ -5050,6 +5062,8 @@
                   <a:srgbClr val="FFFFFF"/>
                 </a:solidFill>
                 <a:latin typeface="맑은 고딕"/>
+                <a:ea typeface="맑은 고딕"/>
+                <a:cs typeface="맑은 고딕"/>
               </a:rPr>
               <a:t>다음 차시 예고 및 준비</a:t>
             </a:r>
@@ -5089,6 +5103,8 @@
                   <a:srgbClr val="0D9488"/>
                 </a:solidFill>
                 <a:latin typeface="맑은 고딕"/>
+                <a:ea typeface="맑은 고딕"/>
+                <a:cs typeface="맑은 고딕"/>
               </a:rPr>
               <a:t>●  </a:t>
             </a:r>
@@ -5098,6 +5114,8 @@
                   <a:srgbClr val="222733"/>
                 </a:solidFill>
                 <a:latin typeface="맑은 고딕"/>
+                <a:ea typeface="맑은 고딕"/>
+                <a:cs typeface="맑은 고딕"/>
               </a:rPr>
               <a:t>다음 2차시부터는 직접 나만의 Python Flask 앱을 만들어 이미지로 빌드합니다</a:t>
             </a:r>
@@ -5114,6 +5132,8 @@
                   <a:srgbClr val="0D9488"/>
                 </a:solidFill>
                 <a:latin typeface="맑은 고딕"/>
+                <a:ea typeface="맑은 고딕"/>
+                <a:cs typeface="맑은 고딕"/>
               </a:rPr>
               <a:t>●  </a:t>
             </a:r>
@@ -5123,6 +5143,8 @@
                   <a:srgbClr val="222733"/>
                 </a:solidFill>
                 <a:latin typeface="맑은 고딕"/>
+                <a:ea typeface="맑은 고딕"/>
+                <a:cs typeface="맑은 고딕"/>
               </a:rPr>
               <a:t>2차시 전에 GitHub·Docker Hub 계정이 필요합니다 (없으면 미리 가입 권장)</a:t>
             </a:r>
@@ -5139,6 +5161,8 @@
                   <a:srgbClr val="0D9488"/>
                 </a:solidFill>
                 <a:latin typeface="맑은 고딕"/>
+                <a:ea typeface="맑은 고딕"/>
+                <a:cs typeface="맑은 고딕"/>
               </a:rPr>
               <a:t>●  </a:t>
             </a:r>
@@ -5148,6 +5172,8 @@
                   <a:srgbClr val="222733"/>
                 </a:solidFill>
                 <a:latin typeface="맑은 고딕"/>
+                <a:ea typeface="맑은 고딕"/>
+                <a:cs typeface="맑은 고딕"/>
               </a:rPr>
               <a:t>가입 방법은 다음 차시 도입부에 단계별로 안내합니다</a:t>
             </a:r>
@@ -5183,6 +5209,8 @@
                   <a:srgbClr val="5B6373"/>
                 </a:solidFill>
                 <a:latin typeface="맑은 고딕"/>
+                <a:ea typeface="맑은 고딕"/>
+                <a:cs typeface="맑은 고딕"/>
               </a:rPr>
               <a:t>클라우드인프라관리  ·  3주차 1차시</a:t>
             </a:r>
@@ -5218,6 +5246,8 @@
                   <a:srgbClr val="5B6373"/>
                 </a:solidFill>
                 <a:latin typeface="맑은 고딕"/>
+                <a:ea typeface="맑은 고딕"/>
+                <a:cs typeface="맑은 고딕"/>
               </a:rPr>
               <a:t>10 / 11</a:t>
             </a:r>
@@ -5403,6 +5433,8 @@
                   <a:srgbClr val="FFFFFF"/>
                 </a:solidFill>
                 <a:latin typeface="맑은 고딕"/>
+                <a:ea typeface="맑은 고딕"/>
+                <a:cs typeface="맑은 고딕"/>
               </a:rPr>
               <a:t>오늘의 정리</a:t>
             </a:r>
@@ -5456,6 +5488,8 @@
                   <a:srgbClr val="14213D"/>
                 </a:solidFill>
                 <a:latin typeface="맑은 고딕"/>
+                <a:ea typeface="맑은 고딕"/>
+                <a:cs typeface="맑은 고딕"/>
               </a:rPr>
               <a:t>1</a:t>
             </a:r>
@@ -5491,6 +5525,8 @@
                   <a:srgbClr val="FFFFFF"/>
                 </a:solidFill>
                 <a:latin typeface="맑은 고딕"/>
+                <a:ea typeface="맑은 고딕"/>
+                <a:cs typeface="맑은 고딕"/>
               </a:rPr>
               <a:t>Dockerfile = 이미지를 만드는 레시피</a:t>
             </a:r>
@@ -5544,6 +5580,8 @@
                   <a:srgbClr val="14213D"/>
                 </a:solidFill>
                 <a:latin typeface="맑은 고딕"/>
+                <a:ea typeface="맑은 고딕"/>
+                <a:cs typeface="맑은 고딕"/>
               </a:rPr>
               <a:t>2</a:t>
             </a:r>
@@ -5579,6 +5617,8 @@
                   <a:srgbClr val="FFFFFF"/>
                 </a:solidFill>
                 <a:latin typeface="맑은 고딕"/>
+                <a:ea typeface="맑은 고딕"/>
+                <a:cs typeface="맑은 고딕"/>
               </a:rPr>
               <a:t>docker build로 Dockerfile을 실제 이미지로 변환한다</a:t>
             </a:r>
@@ -5720,6 +5760,8 @@
                   <a:srgbClr val="FFFFFF"/>
                 </a:solidFill>
                 <a:latin typeface="맑은 고딕"/>
+                <a:ea typeface="맑은 고딕"/>
+                <a:cs typeface="맑은 고딕"/>
               </a:rPr>
               <a:t>다음 차시 예고</a:t>
             </a:r>
@@ -5755,6 +5797,8 @@
                   <a:srgbClr val="14B8A6"/>
                 </a:solidFill>
                 <a:latin typeface="맑은 고딕"/>
+                <a:ea typeface="맑은 고딕"/>
+                <a:cs typeface="맑은 고딕"/>
               </a:rPr>
               <a:t>다음 차시 예고 — 3주차 2차시</a:t>
             </a:r>
@@ -5790,6 +5834,8 @@
                   <a:srgbClr val="FFFFFF"/>
                 </a:solidFill>
                 <a:latin typeface="맑은 고딕"/>
+                <a:ea typeface="맑은 고딕"/>
+                <a:cs typeface="맑은 고딕"/>
               </a:rPr>
               <a:t>GitHub·Docker Hub 계정을 준비하고, 직접 만든 Python Flask 앱을 Dockerfile로 빌드해봅니다.</a:t>
             </a:r>
@@ -5931,6 +5977,8 @@
                   <a:srgbClr val="14B8A6"/>
                 </a:solidFill>
                 <a:latin typeface="맑은 고딕"/>
+                <a:ea typeface="맑은 고딕"/>
+                <a:cs typeface="맑은 고딕"/>
               </a:rPr>
               <a:t>SESSION OVERVIEW</a:t>
             </a:r>
@@ -5966,6 +6014,8 @@
                   <a:srgbClr val="FFFFFF"/>
                 </a:solidFill>
                 <a:latin typeface="맑은 고딕"/>
+                <a:ea typeface="맑은 고딕"/>
+                <a:cs typeface="맑은 고딕"/>
               </a:rPr>
               <a:t>오늘의 학습 목표</a:t>
             </a:r>
@@ -6005,6 +6055,8 @@
                   <a:srgbClr val="222733"/>
                 </a:solidFill>
                 <a:latin typeface="맑은 고딕"/>
+                <a:ea typeface="맑은 고딕"/>
+                <a:cs typeface="맑은 고딕"/>
               </a:rPr>
               <a:t>1.  Dockerfile이 무엇이고 왜 필요한지 이해한다</a:t>
             </a:r>
@@ -6021,6 +6073,8 @@
                   <a:srgbClr val="222733"/>
                 </a:solidFill>
                 <a:latin typeface="맑은 고딕"/>
+                <a:ea typeface="맑은 고딕"/>
+                <a:cs typeface="맑은 고딕"/>
               </a:rPr>
               <a:t>2.  FROM·WORKDIR·COPY·RUN·EXPOSE·CMD 명령어를 이해한다</a:t>
             </a:r>
@@ -6037,6 +6091,8 @@
                   <a:srgbClr val="222733"/>
                 </a:solidFill>
                 <a:latin typeface="맑은 고딕"/>
+                <a:ea typeface="맑은 고딕"/>
+                <a:cs typeface="맑은 고딕"/>
               </a:rPr>
               <a:t>3.  docker build로 Dockerfile을 이미지로 만들어본다</a:t>
             </a:r>
@@ -6072,6 +6128,8 @@
                   <a:srgbClr val="5B6373"/>
                 </a:solidFill>
                 <a:latin typeface="맑은 고딕"/>
+                <a:ea typeface="맑은 고딕"/>
+                <a:cs typeface="맑은 고딕"/>
               </a:rPr>
               <a:t>클라우드인프라관리  ·  3주차 1차시</a:t>
             </a:r>
@@ -6107,6 +6165,8 @@
                   <a:srgbClr val="5B6373"/>
                 </a:solidFill>
                 <a:latin typeface="맑은 고딕"/>
+                <a:ea typeface="맑은 고딕"/>
+                <a:cs typeface="맑은 고딕"/>
               </a:rPr>
               <a:t>02 / 11</a:t>
             </a:r>
@@ -6292,6 +6352,8 @@
                   <a:srgbClr val="14B8A6"/>
                 </a:solidFill>
                 <a:latin typeface="맑은 고딕"/>
+                <a:ea typeface="맑은 고딕"/>
+                <a:cs typeface="맑은 고딕"/>
               </a:rPr>
               <a:t>SESSION OVERVIEW</a:t>
             </a:r>
@@ -6327,6 +6389,8 @@
                   <a:srgbClr val="FFFFFF"/>
                 </a:solidFill>
                 <a:latin typeface="맑은 고딕"/>
+                <a:ea typeface="맑은 고딕"/>
+                <a:cs typeface="맑은 고딕"/>
               </a:rPr>
               <a:t>오늘의 진행 순서</a:t>
             </a:r>
@@ -6538,6 +6602,8 @@
                   <a:srgbClr val="FFFFFF"/>
                 </a:solidFill>
                 <a:latin typeface="맑은 고딕"/>
+                <a:ea typeface="맑은 고딕"/>
+                <a:cs typeface="맑은 고딕"/>
               </a:rPr>
               <a:t>1</a:t>
             </a:r>
@@ -6621,6 +6687,8 @@
                   <a:srgbClr val="14213D"/>
                 </a:solidFill>
                 <a:latin typeface="맑은 고딕"/>
+                <a:ea typeface="맑은 고딕"/>
+                <a:cs typeface="맑은 고딕"/>
               </a:rPr>
               <a:t>개념 설명</a:t>
             </a:r>
@@ -6660,6 +6728,8 @@
                   <a:srgbClr val="222733"/>
                 </a:solidFill>
                 <a:latin typeface="맑은 고딕"/>
+                <a:ea typeface="맑은 고딕"/>
+                <a:cs typeface="맑은 고딕"/>
               </a:rPr>
               <a:t>강의자료 기반 직접 강의</a:t>
             </a:r>
@@ -6739,6 +6809,8 @@
                   <a:srgbClr val="FFFFFF"/>
                 </a:solidFill>
                 <a:latin typeface="맑은 고딕"/>
+                <a:ea typeface="맑은 고딕"/>
+                <a:cs typeface="맑은 고딕"/>
               </a:rPr>
               <a:t>2</a:t>
             </a:r>
@@ -6822,6 +6894,8 @@
                   <a:srgbClr val="14213D"/>
                 </a:solidFill>
                 <a:latin typeface="맑은 고딕"/>
+                <a:ea typeface="맑은 고딕"/>
+                <a:cs typeface="맑은 고딕"/>
               </a:rPr>
               <a:t>Killercoda</a:t>
             </a:r>
@@ -6861,6 +6935,8 @@
                   <a:srgbClr val="222733"/>
                 </a:solidFill>
                 <a:latin typeface="맑은 고딕"/>
+                <a:ea typeface="맑은 고딕"/>
+                <a:cs typeface="맑은 고딕"/>
               </a:rPr>
               <a:t>빈칸 Dockerfile 완성 실습</a:t>
             </a:r>
@@ -6940,6 +7016,8 @@
                   <a:srgbClr val="FFFFFF"/>
                 </a:solidFill>
                 <a:latin typeface="맑은 고딕"/>
+                <a:ea typeface="맑은 고딕"/>
+                <a:cs typeface="맑은 고딕"/>
               </a:rPr>
               <a:t>3</a:t>
             </a:r>
@@ -7023,6 +7101,8 @@
                   <a:srgbClr val="14213D"/>
                 </a:solidFill>
                 <a:latin typeface="맑은 고딕"/>
+                <a:ea typeface="맑은 고딕"/>
+                <a:cs typeface="맑은 고딕"/>
               </a:rPr>
               <a:t>VM 안내</a:t>
             </a:r>
@@ -7062,6 +7142,8 @@
                   <a:srgbClr val="222733"/>
                 </a:solidFill>
                 <a:latin typeface="맑은 고딕"/>
+                <a:ea typeface="맑은 고딕"/>
+                <a:cs typeface="맑은 고딕"/>
               </a:rPr>
               <a:t>다음 차시 예고</a:t>
             </a:r>
@@ -7141,6 +7223,8 @@
                   <a:srgbClr val="FFFFFF"/>
                 </a:solidFill>
                 <a:latin typeface="맑은 고딕"/>
+                <a:ea typeface="맑은 고딕"/>
+                <a:cs typeface="맑은 고딕"/>
               </a:rPr>
               <a:t>4</a:t>
             </a:r>
@@ -7224,6 +7308,8 @@
                   <a:srgbClr val="14213D"/>
                 </a:solidFill>
                 <a:latin typeface="맑은 고딕"/>
+                <a:ea typeface="맑은 고딕"/>
+                <a:cs typeface="맑은 고딕"/>
               </a:rPr>
               <a:t>결과 제출</a:t>
             </a:r>
@@ -7263,6 +7349,8 @@
                   <a:srgbClr val="222733"/>
                 </a:solidFill>
                 <a:latin typeface="맑은 고딕"/>
+                <a:ea typeface="맑은 고딕"/>
+                <a:cs typeface="맑은 고딕"/>
               </a:rPr>
               <a:t>체크리스트 제출</a:t>
             </a:r>
@@ -7298,6 +7386,8 @@
                   <a:srgbClr val="5B6373"/>
                 </a:solidFill>
                 <a:latin typeface="맑은 고딕"/>
+                <a:ea typeface="맑은 고딕"/>
+                <a:cs typeface="맑은 고딕"/>
               </a:rPr>
               <a:t>클라우드인프라관리  ·  3주차 1차시</a:t>
             </a:r>
@@ -7333,6 +7423,8 @@
                   <a:srgbClr val="5B6373"/>
                 </a:solidFill>
                 <a:latin typeface="맑은 고딕"/>
+                <a:ea typeface="맑은 고딕"/>
+                <a:cs typeface="맑은 고딕"/>
               </a:rPr>
               <a:t>03 / 11</a:t>
             </a:r>
@@ -7536,6 +7628,8 @@
                   <a:srgbClr val="14213D"/>
                 </a:solidFill>
                 <a:latin typeface="맑은 고딕"/>
+                <a:ea typeface="맑은 고딕"/>
+                <a:cs typeface="맑은 고딕"/>
               </a:rPr>
               <a:t>PART 01</a:t>
             </a:r>
@@ -7571,6 +7665,8 @@
                   <a:srgbClr val="FFFFFF"/>
                 </a:solidFill>
                 <a:latin typeface="맑은 고딕"/>
+                <a:ea typeface="맑은 고딕"/>
+                <a:cs typeface="맑은 고딕"/>
               </a:rPr>
               <a:t>Dockerfile이란?</a:t>
             </a:r>
@@ -7606,6 +7702,8 @@
                   <a:srgbClr val="C9D3E6"/>
                 </a:solidFill>
                 <a:latin typeface="맑은 고딕"/>
+                <a:ea typeface="맑은 고딕"/>
+                <a:cs typeface="맑은 고딕"/>
               </a:rPr>
               <a:t>이미지를 만드는 레시피</a:t>
             </a:r>
@@ -7765,6 +7863,8 @@
                   <a:srgbClr val="14213D"/>
                 </a:solidFill>
                 <a:latin typeface="맑은 고딕"/>
+                <a:ea typeface="맑은 고딕"/>
+                <a:cs typeface="맑은 고딕"/>
               </a:rPr>
               <a:t>01</a:t>
             </a:r>
@@ -7800,6 +7900,8 @@
                   <a:srgbClr val="14B8A6"/>
                 </a:solidFill>
                 <a:latin typeface="맑은 고딕"/>
+                <a:ea typeface="맑은 고딕"/>
+                <a:cs typeface="맑은 고딕"/>
               </a:rPr>
               <a:t>PART 1 · Dockerfile이란?</a:t>
             </a:r>
@@ -7835,6 +7937,8 @@
                   <a:srgbClr val="FFFFFF"/>
                 </a:solidFill>
                 <a:latin typeface="맑은 고딕"/>
+                <a:ea typeface="맑은 고딕"/>
+                <a:cs typeface="맑은 고딕"/>
               </a:rPr>
               <a:t>지금까지와 오늘의 차이</a:t>
             </a:r>
@@ -7874,6 +7978,8 @@
                   <a:srgbClr val="0D9488"/>
                 </a:solidFill>
                 <a:latin typeface="맑은 고딕"/>
+                <a:ea typeface="맑은 고딕"/>
+                <a:cs typeface="맑은 고딕"/>
               </a:rPr>
               <a:t>●  </a:t>
             </a:r>
@@ -7883,6 +7989,8 @@
                   <a:srgbClr val="222733"/>
                 </a:solidFill>
                 <a:latin typeface="맑은 고딕"/>
+                <a:ea typeface="맑은 고딕"/>
+                <a:cs typeface="맑은 고딕"/>
               </a:rPr>
               <a:t>지금까지는 nginx처럼 이미 완성된 이미지만 가져다 썼음</a:t>
             </a:r>
@@ -7899,6 +8007,8 @@
                   <a:srgbClr val="0D9488"/>
                 </a:solidFill>
                 <a:latin typeface="맑은 고딕"/>
+                <a:ea typeface="맑은 고딕"/>
+                <a:cs typeface="맑은 고딕"/>
               </a:rPr>
               <a:t>●  </a:t>
             </a:r>
@@ -7908,6 +8018,8 @@
                   <a:srgbClr val="222733"/>
                 </a:solidFill>
                 <a:latin typeface="맑은 고딕"/>
+                <a:ea typeface="맑은 고딕"/>
+                <a:cs typeface="맑은 고딕"/>
               </a:rPr>
               <a:t>Dockerfile은 '이런 순서로 이미지를 만들어라'라고 적어두는 설계도(레시피)</a:t>
             </a:r>
@@ -7924,6 +8036,8 @@
                   <a:srgbClr val="0D9488"/>
                 </a:solidFill>
                 <a:latin typeface="맑은 고딕"/>
+                <a:ea typeface="맑은 고딕"/>
+                <a:cs typeface="맑은 고딕"/>
               </a:rPr>
               <a:t>●  </a:t>
             </a:r>
@@ -7933,6 +8047,8 @@
                   <a:srgbClr val="222733"/>
                 </a:solidFill>
                 <a:latin typeface="맑은 고딕"/>
+                <a:ea typeface="맑은 고딕"/>
+                <a:cs typeface="맑은 고딕"/>
               </a:rPr>
               <a:t>docker build 명령으로 이 레시피를 실제 이미지로 변환</a:t>
             </a:r>
@@ -8012,6 +8128,8 @@
                   <a:srgbClr val="FFFFFF"/>
                 </a:solidFill>
                 <a:latin typeface="맑은 고딕"/>
+                <a:ea typeface="맑은 고딕"/>
+                <a:cs typeface="맑은 고딕"/>
               </a:rPr>
               <a:t>🎯  오늘부터</a:t>
             </a:r>
@@ -8047,6 +8165,8 @@
                   <a:srgbClr val="FFFFFF"/>
                 </a:solidFill>
                 <a:latin typeface="맑은 고딕"/>
+                <a:ea typeface="맑은 고딕"/>
+                <a:cs typeface="맑은 고딕"/>
               </a:rPr>
               <a:t>여러분만의 앱을 담은, 세상에 하나뿐인 이미지를 직접 만들게 됩니다</a:t>
             </a:r>
@@ -8082,6 +8202,8 @@
                   <a:srgbClr val="5B6373"/>
                 </a:solidFill>
                 <a:latin typeface="맑은 고딕"/>
+                <a:ea typeface="맑은 고딕"/>
+                <a:cs typeface="맑은 고딕"/>
               </a:rPr>
               <a:t>클라우드인프라관리  ·  3주차 1차시</a:t>
             </a:r>
@@ -8117,6 +8239,8 @@
                   <a:srgbClr val="5B6373"/>
                 </a:solidFill>
                 <a:latin typeface="맑은 고딕"/>
+                <a:ea typeface="맑은 고딕"/>
+                <a:cs typeface="맑은 고딕"/>
               </a:rPr>
               <a:t>05 / 11</a:t>
             </a:r>
@@ -8320,6 +8444,8 @@
                   <a:srgbClr val="14213D"/>
                 </a:solidFill>
                 <a:latin typeface="맑은 고딕"/>
+                <a:ea typeface="맑은 고딕"/>
+                <a:cs typeface="맑은 고딕"/>
               </a:rPr>
               <a:t>01</a:t>
             </a:r>
@@ -8355,6 +8481,8 @@
                   <a:srgbClr val="14B8A6"/>
                 </a:solidFill>
                 <a:latin typeface="맑은 고딕"/>
+                <a:ea typeface="맑은 고딕"/>
+                <a:cs typeface="맑은 고딕"/>
               </a:rPr>
               <a:t>PART 1 · Dockerfile이란?</a:t>
             </a:r>
@@ -8390,6 +8518,8 @@
                   <a:srgbClr val="FFFFFF"/>
                 </a:solidFill>
                 <a:latin typeface="맑은 고딕"/>
+                <a:ea typeface="맑은 고딕"/>
+                <a:cs typeface="맑은 고딕"/>
               </a:rPr>
               <a:t>주요 명령어 한눈에 보기</a:t>
             </a:r>
@@ -8469,6 +8599,8 @@
                   <a:srgbClr val="FFFFFF"/>
                 </a:solidFill>
                 <a:latin typeface="맑은 고딕"/>
+                <a:ea typeface="맑은 고딕"/>
+                <a:cs typeface="맑은 고딕"/>
               </a:rPr>
               <a:t>명령어</a:t>
             </a:r>
@@ -8548,6 +8680,8 @@
                   <a:srgbClr val="FFFFFF"/>
                 </a:solidFill>
                 <a:latin typeface="맑은 고딕"/>
+                <a:ea typeface="맑은 고딕"/>
+                <a:cs typeface="맑은 고딕"/>
               </a:rPr>
               <a:t>역할</a:t>
             </a:r>
@@ -8627,6 +8761,8 @@
                   <a:srgbClr val="14213D"/>
                 </a:solidFill>
                 <a:latin typeface="맑은 고딕"/>
+                <a:ea typeface="맑은 고딕"/>
+                <a:cs typeface="맑은 고딕"/>
               </a:rPr>
               <a:t>FROM</a:t>
             </a:r>
@@ -8706,6 +8842,8 @@
                   <a:srgbClr val="222733"/>
                 </a:solidFill>
                 <a:latin typeface="맑은 고딕"/>
+                <a:ea typeface="맑은 고딕"/>
+                <a:cs typeface="맑은 고딕"/>
               </a:rPr>
               <a:t>어떤 이미지를 기반으로 시작할지 지정 (예: python:3.11-slim)</a:t>
             </a:r>
@@ -8785,6 +8923,8 @@
                   <a:srgbClr val="14213D"/>
                 </a:solidFill>
                 <a:latin typeface="맑은 고딕"/>
+                <a:ea typeface="맑은 고딕"/>
+                <a:cs typeface="맑은 고딕"/>
               </a:rPr>
               <a:t>WORKDIR</a:t>
             </a:r>
@@ -8864,6 +9004,8 @@
                   <a:srgbClr val="222733"/>
                 </a:solidFill>
                 <a:latin typeface="맑은 고딕"/>
+                <a:ea typeface="맑은 고딕"/>
+                <a:cs typeface="맑은 고딕"/>
               </a:rPr>
               <a:t>컨테이너 안에서 작업할 디렉토리 지정</a:t>
             </a:r>
@@ -8943,6 +9085,8 @@
                   <a:srgbClr val="14213D"/>
                 </a:solidFill>
                 <a:latin typeface="맑은 고딕"/>
+                <a:ea typeface="맑은 고딕"/>
+                <a:cs typeface="맑은 고딕"/>
               </a:rPr>
               <a:t>COPY</a:t>
             </a:r>
@@ -9022,6 +9166,8 @@
                   <a:srgbClr val="222733"/>
                 </a:solidFill>
                 <a:latin typeface="맑은 고딕"/>
+                <a:ea typeface="맑은 고딕"/>
+                <a:cs typeface="맑은 고딕"/>
               </a:rPr>
               <a:t>내 컴퓨터의 파일을 이미지 안으로 복사</a:t>
             </a:r>
@@ -9101,6 +9247,8 @@
                   <a:srgbClr val="14213D"/>
                 </a:solidFill>
                 <a:latin typeface="맑은 고딕"/>
+                <a:ea typeface="맑은 고딕"/>
+                <a:cs typeface="맑은 고딕"/>
               </a:rPr>
               <a:t>RUN</a:t>
             </a:r>
@@ -9180,6 +9328,8 @@
                   <a:srgbClr val="222733"/>
                 </a:solidFill>
                 <a:latin typeface="맑은 고딕"/>
+                <a:ea typeface="맑은 고딕"/>
+                <a:cs typeface="맑은 고딕"/>
               </a:rPr>
               <a:t>이미지를 만드는 동안 실행할 명령어 (예: 패키지 설치)</a:t>
             </a:r>
@@ -9259,6 +9409,8 @@
                   <a:srgbClr val="14213D"/>
                 </a:solidFill>
                 <a:latin typeface="맑은 고딕"/>
+                <a:ea typeface="맑은 고딕"/>
+                <a:cs typeface="맑은 고딕"/>
               </a:rPr>
               <a:t>EXPOSE</a:t>
             </a:r>
@@ -9338,6 +9490,8 @@
                   <a:srgbClr val="222733"/>
                 </a:solidFill>
                 <a:latin typeface="맑은 고딕"/>
+                <a:ea typeface="맑은 고딕"/>
+                <a:cs typeface="맑은 고딕"/>
               </a:rPr>
               <a:t>이 컨테이너가 사용할 포트 명시(문서 역할)</a:t>
             </a:r>
@@ -9417,6 +9571,8 @@
                   <a:srgbClr val="14213D"/>
                 </a:solidFill>
                 <a:latin typeface="맑은 고딕"/>
+                <a:ea typeface="맑은 고딕"/>
+                <a:cs typeface="맑은 고딕"/>
               </a:rPr>
               <a:t>CMD</a:t>
             </a:r>
@@ -9496,6 +9652,8 @@
                   <a:srgbClr val="222733"/>
                 </a:solidFill>
                 <a:latin typeface="맑은 고딕"/>
+                <a:ea typeface="맑은 고딕"/>
+                <a:cs typeface="맑은 고딕"/>
               </a:rPr>
               <a:t>컨테이너가 시작될 때 실행할 명령어</a:t>
             </a:r>
@@ -9531,6 +9689,8 @@
                   <a:srgbClr val="5B6373"/>
                 </a:solidFill>
                 <a:latin typeface="맑은 고딕"/>
+                <a:ea typeface="맑은 고딕"/>
+                <a:cs typeface="맑은 고딕"/>
               </a:rPr>
               <a:t>클라우드인프라관리  ·  3주차 1차시</a:t>
             </a:r>
@@ -9566,6 +9726,8 @@
                   <a:srgbClr val="5B6373"/>
                 </a:solidFill>
                 <a:latin typeface="맑은 고딕"/>
+                <a:ea typeface="맑은 고딕"/>
+                <a:cs typeface="맑은 고딕"/>
               </a:rPr>
               <a:t>06 / 11</a:t>
             </a:r>
@@ -9769,6 +9931,8 @@
                   <a:srgbClr val="14213D"/>
                 </a:solidFill>
                 <a:latin typeface="맑은 고딕"/>
+                <a:ea typeface="맑은 고딕"/>
+                <a:cs typeface="맑은 고딕"/>
               </a:rPr>
               <a:t>PART 02</a:t>
             </a:r>
@@ -9804,6 +9968,8 @@
                   <a:srgbClr val="FFFFFF"/>
                 </a:solidFill>
                 <a:latin typeface="맑은 고딕"/>
+                <a:ea typeface="맑은 고딕"/>
+                <a:cs typeface="맑은 고딕"/>
               </a:rPr>
               <a:t>docker build 과정</a:t>
             </a:r>
@@ -9839,6 +10005,8 @@
                   <a:srgbClr val="C9D3E6"/>
                 </a:solidFill>
                 <a:latin typeface="맑은 고딕"/>
+                <a:ea typeface="맑은 고딕"/>
+                <a:cs typeface="맑은 고딕"/>
               </a:rPr>
               <a:t>Dockerfile → 이미지</a:t>
             </a:r>
@@ -9998,6 +10166,8 @@
                   <a:srgbClr val="14213D"/>
                 </a:solidFill>
                 <a:latin typeface="맑은 고딕"/>
+                <a:ea typeface="맑은 고딕"/>
+                <a:cs typeface="맑은 고딕"/>
               </a:rPr>
               <a:t>02</a:t>
             </a:r>
@@ -10033,6 +10203,8 @@
                   <a:srgbClr val="14B8A6"/>
                 </a:solidFill>
                 <a:latin typeface="맑은 고딕"/>
+                <a:ea typeface="맑은 고딕"/>
+                <a:cs typeface="맑은 고딕"/>
               </a:rPr>
               <a:t>PART 2 · docker build 과정</a:t>
             </a:r>
@@ -10068,6 +10240,8 @@
                   <a:srgbClr val="FFFFFF"/>
                 </a:solidFill>
                 <a:latin typeface="맑은 고딕"/>
+                <a:ea typeface="맑은 고딕"/>
+                <a:cs typeface="맑은 고딕"/>
               </a:rPr>
               <a:t>Dockerfile이 이미지가 되기까지</a:t>
             </a:r>
@@ -10107,6 +10281,8 @@
                   <a:srgbClr val="0D9488"/>
                 </a:solidFill>
                 <a:latin typeface="맑은 고딕"/>
+                <a:ea typeface="맑은 고딕"/>
+                <a:cs typeface="맑은 고딕"/>
               </a:rPr>
               <a:t>●  </a:t>
             </a:r>
@@ -10116,6 +10292,8 @@
                   <a:srgbClr val="222733"/>
                 </a:solidFill>
                 <a:latin typeface="맑은 고딕"/>
+                <a:ea typeface="맑은 고딕"/>
+                <a:cs typeface="맑은 고딕"/>
               </a:rPr>
               <a:t>docker build -t {이름}:{태그} . 명령으로 시작</a:t>
             </a:r>
@@ -10132,6 +10310,8 @@
                   <a:srgbClr val="0D9488"/>
                 </a:solidFill>
                 <a:latin typeface="맑은 고딕"/>
+                <a:ea typeface="맑은 고딕"/>
+                <a:cs typeface="맑은 고딕"/>
               </a:rPr>
               <a:t>●  </a:t>
             </a:r>
@@ -10141,6 +10321,8 @@
                   <a:srgbClr val="222733"/>
                 </a:solidFill>
                 <a:latin typeface="맑은 고딕"/>
+                <a:ea typeface="맑은 고딕"/>
+                <a:cs typeface="맑은 고딕"/>
               </a:rPr>
               <a:t>Dockerfile을 한 줄씩 순서대로 실행하며 '레이어'를 하나씩 쌓음</a:t>
             </a:r>
@@ -10157,6 +10339,8 @@
                   <a:srgbClr val="0D9488"/>
                 </a:solidFill>
                 <a:latin typeface="맑은 고딕"/>
+                <a:ea typeface="맑은 고딕"/>
+                <a:cs typeface="맑은 고딕"/>
               </a:rPr>
               <a:t>●  </a:t>
             </a:r>
@@ -10166,6 +10350,8 @@
                   <a:srgbClr val="222733"/>
                 </a:solidFill>
                 <a:latin typeface="맑은 고딕"/>
+                <a:ea typeface="맑은 고딕"/>
+                <a:cs typeface="맑은 고딕"/>
               </a:rPr>
               <a:t>마지막 레이어까지 쌓이면 하나의 완성된 이미지가 됨</a:t>
             </a:r>
@@ -10201,6 +10387,8 @@
                   <a:srgbClr val="14213D"/>
                 </a:solidFill>
                 <a:latin typeface="맑은 고딕"/>
+                <a:ea typeface="맑은 고딕"/>
+                <a:cs typeface="맑은 고딕"/>
               </a:rPr>
               <a:t>레이어가 쌓이는 순서</a:t>
             </a:r>
@@ -10280,6 +10468,8 @@
                   <a:srgbClr val="FFFFFF"/>
                 </a:solidFill>
                 <a:latin typeface="맑은 고딕"/>
+                <a:ea typeface="맑은 고딕"/>
+                <a:cs typeface="맑은 고딕"/>
               </a:rPr>
               <a:t>FROM python:3.11-slim</a:t>
             </a:r>
@@ -10359,6 +10549,8 @@
                   <a:srgbClr val="FFFFFF"/>
                 </a:solidFill>
                 <a:latin typeface="맑은 고딕"/>
+                <a:ea typeface="맑은 고딕"/>
+                <a:cs typeface="맑은 고딕"/>
               </a:rPr>
               <a:t>WORKDIR /app</a:t>
             </a:r>
@@ -10438,6 +10630,8 @@
                   <a:srgbClr val="FFFFFF"/>
                 </a:solidFill>
                 <a:latin typeface="맑은 고딕"/>
+                <a:ea typeface="맑은 고딕"/>
+                <a:cs typeface="맑은 고딕"/>
               </a:rPr>
               <a:t>COPY app.py .</a:t>
             </a:r>
@@ -10517,6 +10711,8 @@
                   <a:srgbClr val="FFFFFF"/>
                 </a:solidFill>
                 <a:latin typeface="맑은 고딕"/>
+                <a:ea typeface="맑은 고딕"/>
+                <a:cs typeface="맑은 고딕"/>
               </a:rPr>
               <a:t>RUN pip install flask</a:t>
             </a:r>
@@ -10596,6 +10792,8 @@
                   <a:srgbClr val="FFFFFF"/>
                 </a:solidFill>
                 <a:latin typeface="맑은 고딕"/>
+                <a:ea typeface="맑은 고딕"/>
+                <a:cs typeface="맑은 고딕"/>
               </a:rPr>
               <a:t>CMD ["python","app.py"]</a:t>
             </a:r>
@@ -10631,6 +10829,8 @@
                   <a:srgbClr val="5B6373"/>
                 </a:solidFill>
                 <a:latin typeface="맑은 고딕"/>
+                <a:ea typeface="맑은 고딕"/>
+                <a:cs typeface="맑은 고딕"/>
               </a:rPr>
               <a:t>클라우드인프라관리  ·  3주차 1차시</a:t>
             </a:r>
@@ -10666,6 +10866,8 @@
                   <a:srgbClr val="5B6373"/>
                 </a:solidFill>
                 <a:latin typeface="맑은 고딕"/>
+                <a:ea typeface="맑은 고딕"/>
+                <a:cs typeface="맑은 고딕"/>
               </a:rPr>
               <a:t>08 / 11</a:t>
             </a:r>
@@ -10869,6 +11071,8 @@
                   <a:srgbClr val="14213D"/>
                 </a:solidFill>
                 <a:latin typeface="맑은 고딕"/>
+                <a:ea typeface="맑은 고딕"/>
+                <a:cs typeface="맑은 고딕"/>
               </a:rPr>
               <a:t>03</a:t>
             </a:r>
@@ -10904,6 +11108,8 @@
                   <a:srgbClr val="14B8A6"/>
                 </a:solidFill>
                 <a:latin typeface="맑은 고딕"/>
+                <a:ea typeface="맑은 고딕"/>
+                <a:cs typeface="맑은 고딕"/>
               </a:rPr>
               <a:t>실습 안내</a:t>
             </a:r>
@@ -10939,6 +11145,8 @@
                   <a:srgbClr val="FFFFFF"/>
                 </a:solidFill>
                 <a:latin typeface="맑은 고딕"/>
+                <a:ea typeface="맑은 고딕"/>
+                <a:cs typeface="맑은 고딕"/>
               </a:rPr>
               <a:t>Killercoda — 빈칸 Dockerfile 완성</a:t>
             </a:r>
@@ -10978,6 +11186,8 @@
                   <a:srgbClr val="0D9488"/>
                 </a:solidFill>
                 <a:latin typeface="맑은 고딕"/>
+                <a:ea typeface="맑은 고딕"/>
+                <a:cs typeface="맑은 고딕"/>
               </a:rPr>
               <a:t>●  </a:t>
             </a:r>
@@ -10987,6 +11197,8 @@
                   <a:srgbClr val="222733"/>
                 </a:solidFill>
                 <a:latin typeface="맑은 고딕"/>
+                <a:ea typeface="맑은 고딕"/>
+                <a:cs typeface="맑은 고딕"/>
               </a:rPr>
               <a:t>Node.js 앱이 포함된 실습 환경 제공</a:t>
             </a:r>
@@ -11003,6 +11215,8 @@
                   <a:srgbClr val="0D9488"/>
                 </a:solidFill>
                 <a:latin typeface="맑은 고딕"/>
+                <a:ea typeface="맑은 고딕"/>
+                <a:cs typeface="맑은 고딕"/>
               </a:rPr>
               <a:t>●  </a:t>
             </a:r>
@@ -11012,6 +11226,8 @@
                   <a:srgbClr val="222733"/>
                 </a:solidFill>
                 <a:latin typeface="맑은 고딕"/>
+                <a:ea typeface="맑은 고딕"/>
+                <a:cs typeface="맑은 고딕"/>
               </a:rPr>
               <a:t>빈칸으로 되어 있는 Dockerfile의 FROM / COPY / RUN / CMD를 채워 완성</a:t>
             </a:r>
@@ -11028,6 +11244,8 @@
                   <a:srgbClr val="0D9488"/>
                 </a:solidFill>
                 <a:latin typeface="맑은 고딕"/>
+                <a:ea typeface="맑은 고딕"/>
+                <a:cs typeface="맑은 고딕"/>
               </a:rPr>
               <a:t>●  </a:t>
             </a:r>
@@ -11037,6 +11255,8 @@
                   <a:srgbClr val="222733"/>
                 </a:solidFill>
                 <a:latin typeface="맑은 고딕"/>
+                <a:ea typeface="맑은 고딕"/>
+                <a:cs typeface="맑은 고딕"/>
               </a:rPr>
               <a:t>docker build -t mynode:v1 . 로 빌드</a:t>
             </a:r>
@@ -11053,6 +11273,8 @@
                   <a:srgbClr val="0D9488"/>
                 </a:solidFill>
                 <a:latin typeface="맑은 고딕"/>
+                <a:ea typeface="맑은 고딕"/>
+                <a:cs typeface="맑은 고딕"/>
               </a:rPr>
               <a:t>●  </a:t>
             </a:r>
@@ -11062,6 +11284,8 @@
                   <a:srgbClr val="222733"/>
                 </a:solidFill>
                 <a:latin typeface="맑은 고딕"/>
+                <a:ea typeface="맑은 고딕"/>
+                <a:cs typeface="맑은 고딕"/>
               </a:rPr>
               <a:t>docker run으로 실행 후 정상 동작 확인</a:t>
             </a:r>
@@ -11097,6 +11321,8 @@
                   <a:srgbClr val="5B6373"/>
                 </a:solidFill>
                 <a:latin typeface="맑은 고딕"/>
+                <a:ea typeface="맑은 고딕"/>
+                <a:cs typeface="맑은 고딕"/>
               </a:rPr>
               <a:t>클라우드인프라관리  ·  3주차 1차시</a:t>
             </a:r>
@@ -11132,6 +11358,8 @@
                   <a:srgbClr val="5B6373"/>
                 </a:solidFill>
                 <a:latin typeface="맑은 고딕"/>
+                <a:ea typeface="맑은 고딕"/>
+                <a:cs typeface="맑은 고딕"/>
               </a:rPr>
               <a:t>09 / 11</a:t>
             </a:r>

--- a/class/cloud_infra_mgmt/03주차_Docker심화/01_강의자료/1차시_Dockerfile문법.pptx
+++ b/class/cloud_infra_mgmt/03주차_Docker심화/01_강의자료/1차시_Dockerfile문법.pptx
@@ -5249,7 +5249,7 @@
                 <a:ea typeface="맑은 고딕"/>
                 <a:cs typeface="맑은 고딕"/>
               </a:rPr>
-              <a:t>10 / 11</a:t>
+              <a:t>10 / 12</a:t>
             </a:r>
           </a:p>
         </p:txBody>
@@ -6168,7 +6168,7 @@
                 <a:ea typeface="맑은 고딕"/>
                 <a:cs typeface="맑은 고딕"/>
               </a:rPr>
-              <a:t>02 / 11</a:t>
+              <a:t>02 / 12</a:t>
             </a:r>
           </a:p>
         </p:txBody>
@@ -7426,7 +7426,7 @@
                 <a:ea typeface="맑은 고딕"/>
                 <a:cs typeface="맑은 고딕"/>
               </a:rPr>
-              <a:t>03 / 11</a:t>
+              <a:t>03 / 12</a:t>
             </a:r>
           </a:p>
         </p:txBody>
@@ -8242,7 +8242,7 @@
                 <a:ea typeface="맑은 고딕"/>
                 <a:cs typeface="맑은 고딕"/>
               </a:rPr>
-              <a:t>05 / 11</a:t>
+              <a:t>05 / 12</a:t>
             </a:r>
           </a:p>
         </p:txBody>
@@ -9729,7 +9729,7 @@
                 <a:ea typeface="맑은 고딕"/>
                 <a:cs typeface="맑은 고딕"/>
               </a:rPr>
-              <a:t>06 / 11</a:t>
+              <a:t>06 / 12</a:t>
             </a:r>
           </a:p>
         </p:txBody>
@@ -10869,7 +10869,7 @@
                 <a:ea typeface="맑은 고딕"/>
                 <a:cs typeface="맑은 고딕"/>
               </a:rPr>
-              <a:t>08 / 11</a:t>
+              <a:t>08 / 12</a:t>
             </a:r>
           </a:p>
         </p:txBody>
@@ -11361,7 +11361,7 @@
                 <a:ea typeface="맑은 고딕"/>
                 <a:cs typeface="맑은 고딕"/>
               </a:rPr>
-              <a:t>09 / 11</a:t>
+              <a:t>09 / 12</a:t>
             </a:r>
           </a:p>
         </p:txBody>
